--- a/20260424.pptx
+++ b/20260424.pptx
@@ -216,7 +216,7 @@
           <a:p>
             <a:fld id="{DC9E0D3F-88AC-AC4C-A850-A113E8478B35}" type="datetimeFigureOut">
               <a:rPr kumimoji="1" lang="ja-JP" altLang="en-US" smtClean="0"/>
-              <a:t>2026/4/11</a:t>
+              <a:t>2026/4/20</a:t>
             </a:fld>
             <a:endParaRPr kumimoji="1" lang="ja-JP" altLang="en-US"/>
           </a:p>
@@ -7997,7 +7997,7 @@
                 <a:latin typeface="Consolas" panose="020B0609020204030204" pitchFamily="49" charset="0"/>
                 <a:cs typeface="Consolas" panose="020B0609020204030204" pitchFamily="49" charset="0"/>
               </a:rPr>
-              <a:t>      strategy:</a:t>
+              <a:t>    strategy:</a:t>
             </a:r>
           </a:p>
           <a:p>
@@ -8013,7 +8013,7 @@
                 <a:latin typeface="Consolas" panose="020B0609020204030204" pitchFamily="49" charset="0"/>
                 <a:cs typeface="Consolas" panose="020B0609020204030204" pitchFamily="49" charset="0"/>
               </a:rPr>
-              <a:t>        matrix:</a:t>
+              <a:t>      matrix:</a:t>
             </a:r>
           </a:p>
           <a:p>
@@ -8029,7 +8029,7 @@
                 <a:latin typeface="Consolas" panose="020B0609020204030204" pitchFamily="49" charset="0"/>
                 <a:cs typeface="Consolas" panose="020B0609020204030204" pitchFamily="49" charset="0"/>
               </a:rPr>
-              <a:t>          </a:t>
+              <a:t>        </a:t>
             </a:r>
             <a:r>
               <a:rPr lang="en" altLang="ja-JP" sz="1400" b="0" dirty="0" err="1">
@@ -8073,7 +8073,7 @@
                 <a:latin typeface="Consolas" panose="020B0609020204030204" pitchFamily="49" charset="0"/>
                 <a:cs typeface="Consolas" panose="020B0609020204030204" pitchFamily="49" charset="0"/>
               </a:rPr>
-              <a:t>            - </a:t>
+              <a:t>          - </a:t>
             </a:r>
             <a:r>
               <a:rPr lang="en" altLang="ja-JP" sz="1400" b="0" dirty="0">
@@ -8105,7 +8105,7 @@
                 <a:latin typeface="Consolas" panose="020B0609020204030204" pitchFamily="49" charset="0"/>
                 <a:cs typeface="Consolas" panose="020B0609020204030204" pitchFamily="49" charset="0"/>
               </a:rPr>
-              <a:t>            - </a:t>
+              <a:t>          - </a:t>
             </a:r>
             <a:r>
               <a:rPr lang="en" altLang="ja-JP" sz="1400" b="0" dirty="0">
@@ -8137,7 +8137,7 @@
                 <a:latin typeface="Consolas" panose="020B0609020204030204" pitchFamily="49" charset="0"/>
                 <a:cs typeface="Consolas" panose="020B0609020204030204" pitchFamily="49" charset="0"/>
               </a:rPr>
-              <a:t>            - </a:t>
+              <a:t>          - </a:t>
             </a:r>
             <a:r>
               <a:rPr lang="en" altLang="ja-JP" sz="1400" b="0" dirty="0">
@@ -8232,7 +8232,7 @@
                 <a:latin typeface="Consolas" panose="020B0609020204030204" pitchFamily="49" charset="0"/>
                 <a:cs typeface="Consolas" panose="020B0609020204030204" pitchFamily="49" charset="0"/>
               </a:rPr>
-              <a:t>        run: |</a:t>
+              <a:t>        run:</a:t>
             </a:r>
           </a:p>
           <a:p>
@@ -8436,6 +8436,64 @@
             <a:r>
               <a:rPr lang="en" altLang="ja-JP" sz="1400" dirty="0">
                 <a:solidFill>
+                  <a:schemeClr val="accent5">
+                    <a:lumMod val="75000"/>
+                  </a:schemeClr>
+                </a:solidFill>
+                <a:highlight>
+                  <a:srgbClr val="FFFFFF"/>
+                </a:highlight>
+                <a:latin typeface="Consolas" panose="020B0609020204030204" pitchFamily="49" charset="0"/>
+                <a:cs typeface="Consolas" panose="020B0609020204030204" pitchFamily="49" charset="0"/>
+              </a:rPr>
+              <a:t>          cargo </a:t>
+            </a:r>
+            <a:r>
+              <a:rPr lang="en" altLang="ja-JP" sz="1400" dirty="0" err="1">
+                <a:solidFill>
+                  <a:schemeClr val="accent5">
+                    <a:lumMod val="75000"/>
+                  </a:schemeClr>
+                </a:solidFill>
+                <a:highlight>
+                  <a:srgbClr val="FFFFFF"/>
+                </a:highlight>
+                <a:latin typeface="Consolas" panose="020B0609020204030204" pitchFamily="49" charset="0"/>
+                <a:cs typeface="Consolas" panose="020B0609020204030204" pitchFamily="49" charset="0"/>
+              </a:rPr>
+              <a:t>clippy</a:t>
+            </a:r>
+            <a:r>
+              <a:rPr lang="en" altLang="ja-JP" sz="1400" dirty="0">
+                <a:solidFill>
+                  <a:schemeClr val="accent5">
+                    <a:lumMod val="75000"/>
+                  </a:schemeClr>
+                </a:solidFill>
+                <a:highlight>
+                  <a:srgbClr val="FFFFFF"/>
+                </a:highlight>
+                <a:latin typeface="Consolas" panose="020B0609020204030204" pitchFamily="49" charset="0"/>
+                <a:cs typeface="Consolas" panose="020B0609020204030204" pitchFamily="49" charset="0"/>
+              </a:rPr>
+              <a:t> -- -D warnings</a:t>
+            </a:r>
+            <a:endParaRPr lang="en" altLang="ja-JP" sz="1400" b="0" dirty="0">
+              <a:solidFill>
+                <a:srgbClr val="800000"/>
+              </a:solidFill>
+              <a:effectLst/>
+              <a:highlight>
+                <a:srgbClr val="FFFFFF"/>
+              </a:highlight>
+              <a:latin typeface="Consolas" panose="020B0609020204030204" pitchFamily="49" charset="0"/>
+              <a:cs typeface="Consolas" panose="020B0609020204030204" pitchFamily="49" charset="0"/>
+            </a:endParaRPr>
+          </a:p>
+          <a:p>
+            <a:r>
+              <a:rPr lang="en" altLang="ja-JP" sz="1400" dirty="0">
+                <a:solidFill>
                   <a:srgbClr val="800000"/>
                 </a:solidFill>
                 <a:highlight>
@@ -8460,56 +8518,6 @@
                 <a:cs typeface="Consolas" panose="020B0609020204030204" pitchFamily="49" charset="0"/>
               </a:rPr>
               <a:t>cargo build --release</a:t>
-            </a:r>
-          </a:p>
-          <a:p>
-            <a:r>
-              <a:rPr lang="en" altLang="ja-JP" sz="1400" b="0" dirty="0">
-                <a:solidFill>
-                  <a:schemeClr val="accent5">
-                    <a:lumMod val="75000"/>
-                  </a:schemeClr>
-                </a:solidFill>
-                <a:effectLst/>
-                <a:highlight>
-                  <a:srgbClr val="FFFFFF"/>
-                </a:highlight>
-                <a:latin typeface="Consolas" panose="020B0609020204030204" pitchFamily="49" charset="0"/>
-                <a:cs typeface="Consolas" panose="020B0609020204030204" pitchFamily="49" charset="0"/>
-              </a:rPr>
-              <a:t>          cargo </a:t>
-            </a:r>
-            <a:r>
-              <a:rPr lang="en" altLang="ja-JP" sz="1400" b="0" dirty="0" err="1">
-                <a:solidFill>
-                  <a:schemeClr val="accent5">
-                    <a:lumMod val="75000"/>
-                  </a:schemeClr>
-                </a:solidFill>
-                <a:effectLst/>
-                <a:highlight>
-                  <a:srgbClr val="FFFFFF"/>
-                </a:highlight>
-                <a:latin typeface="Consolas" panose="020B0609020204030204" pitchFamily="49" charset="0"/>
-                <a:cs typeface="Consolas" panose="020B0609020204030204" pitchFamily="49" charset="0"/>
-              </a:rPr>
-              <a:t>clippy</a:t>
-            </a:r>
-            <a:r>
-              <a:rPr lang="en" altLang="ja-JP" sz="1400" b="0" dirty="0">
-                <a:solidFill>
-                  <a:schemeClr val="accent5">
-                    <a:lumMod val="75000"/>
-                  </a:schemeClr>
-                </a:solidFill>
-                <a:effectLst/>
-                <a:highlight>
-                  <a:srgbClr val="FFFFFF"/>
-                </a:highlight>
-                <a:latin typeface="Consolas" panose="020B0609020204030204" pitchFamily="49" charset="0"/>
-                <a:cs typeface="Consolas" panose="020B0609020204030204" pitchFamily="49" charset="0"/>
-              </a:rPr>
-              <a:t> -- -D warnings</a:t>
             </a:r>
           </a:p>
           <a:p>
@@ -9946,8 +9954,33 @@
                 <a:latin typeface="Consolas" panose="020B0609020204030204" pitchFamily="49" charset="0"/>
                 <a:cs typeface="Consolas" panose="020B0609020204030204" pitchFamily="49" charset="0"/>
               </a:rPr>
-              <a:t>        run: |</a:t>
-            </a:r>
+              <a:t>        </a:t>
+            </a:r>
+            <a:r>
+              <a:rPr lang="en" altLang="ja-JP" sz="1400" b="0">
+                <a:solidFill>
+                  <a:srgbClr val="800000"/>
+                </a:solidFill>
+                <a:effectLst/>
+                <a:highlight>
+                  <a:srgbClr val="FFFFFF"/>
+                </a:highlight>
+                <a:latin typeface="Consolas" panose="020B0609020204030204" pitchFamily="49" charset="0"/>
+                <a:cs typeface="Consolas" panose="020B0609020204030204" pitchFamily="49" charset="0"/>
+              </a:rPr>
+              <a:t>run:</a:t>
+            </a:r>
+            <a:endParaRPr lang="en" altLang="ja-JP" sz="1400" b="0" dirty="0">
+              <a:solidFill>
+                <a:srgbClr val="800000"/>
+              </a:solidFill>
+              <a:effectLst/>
+              <a:highlight>
+                <a:srgbClr val="FFFFFF"/>
+              </a:highlight>
+              <a:latin typeface="Consolas" panose="020B0609020204030204" pitchFamily="49" charset="0"/>
+              <a:cs typeface="Consolas" panose="020B0609020204030204" pitchFamily="49" charset="0"/>
+            </a:endParaRPr>
           </a:p>
           <a:p>
             <a:r>
@@ -10148,36 +10181,6 @@
           </a:p>
           <a:p>
             <a:r>
-              <a:rPr lang="en" altLang="ja-JP" sz="1400" dirty="0">
-                <a:solidFill>
-                  <a:srgbClr val="800000"/>
-                </a:solidFill>
-                <a:highlight>
-                  <a:srgbClr val="FFFFFF"/>
-                </a:highlight>
-                <a:latin typeface="Consolas" panose="020B0609020204030204" pitchFamily="49" charset="0"/>
-                <a:cs typeface="Consolas" panose="020B0609020204030204" pitchFamily="49" charset="0"/>
-              </a:rPr>
-              <a:t>          </a:t>
-            </a:r>
-            <a:r>
-              <a:rPr lang="en" altLang="ja-JP" sz="1400" dirty="0">
-                <a:solidFill>
-                  <a:schemeClr val="accent5">
-                    <a:lumMod val="75000"/>
-                  </a:schemeClr>
-                </a:solidFill>
-                <a:highlight>
-                  <a:srgbClr val="FFFFFF"/>
-                </a:highlight>
-                <a:latin typeface="Consolas" panose="020B0609020204030204" pitchFamily="49" charset="0"/>
-                <a:cs typeface="Consolas" panose="020B0609020204030204" pitchFamily="49" charset="0"/>
-              </a:rPr>
-              <a:t>cargo build --release</a:t>
-            </a:r>
-          </a:p>
-          <a:p>
-            <a:r>
               <a:rPr lang="en" altLang="ja-JP" sz="1400" b="0" dirty="0">
                 <a:solidFill>
                   <a:schemeClr val="accent5">
@@ -10227,6 +10230,34 @@
             </a:r>
           </a:p>
           <a:p>
+            <a:r>
+              <a:rPr lang="en" altLang="ja-JP" sz="1400" dirty="0">
+                <a:solidFill>
+                  <a:srgbClr val="800000"/>
+                </a:solidFill>
+                <a:highlight>
+                  <a:srgbClr val="FFFFFF"/>
+                </a:highlight>
+                <a:latin typeface="Consolas" panose="020B0609020204030204" pitchFamily="49" charset="0"/>
+                <a:cs typeface="Consolas" panose="020B0609020204030204" pitchFamily="49" charset="0"/>
+              </a:rPr>
+              <a:t>          </a:t>
+            </a:r>
+            <a:r>
+              <a:rPr lang="en" altLang="ja-JP" sz="1400" dirty="0">
+                <a:solidFill>
+                  <a:schemeClr val="accent5">
+                    <a:lumMod val="75000"/>
+                  </a:schemeClr>
+                </a:solidFill>
+                <a:highlight>
+                  <a:srgbClr val="FFFFFF"/>
+                </a:highlight>
+                <a:latin typeface="Consolas" panose="020B0609020204030204" pitchFamily="49" charset="0"/>
+                <a:cs typeface="Consolas" panose="020B0609020204030204" pitchFamily="49" charset="0"/>
+              </a:rPr>
+              <a:t>cargo build --release</a:t>
+            </a:r>
             <a:endParaRPr lang="en" altLang="ja-JP" sz="1400" b="0" dirty="0">
               <a:solidFill>
                 <a:srgbClr val="800000"/>
@@ -10240,6 +10271,33 @@
             </a:endParaRPr>
           </a:p>
           <a:p>
+            <a:endParaRPr lang="en" altLang="ja-JP" sz="1400" b="0">
+              <a:solidFill>
+                <a:srgbClr val="800000"/>
+              </a:solidFill>
+              <a:effectLst/>
+              <a:highlight>
+                <a:srgbClr val="FFFFFF"/>
+              </a:highlight>
+              <a:latin typeface="Consolas" panose="020B0609020204030204" pitchFamily="49" charset="0"/>
+              <a:cs typeface="Consolas" panose="020B0609020204030204" pitchFamily="49" charset="0"/>
+            </a:endParaRPr>
+          </a:p>
+          <a:p>
+            <a:r>
+              <a:rPr lang="en" altLang="ja-JP" sz="1400" b="0">
+                <a:solidFill>
+                  <a:srgbClr val="800000"/>
+                </a:solidFill>
+                <a:effectLst/>
+                <a:highlight>
+                  <a:srgbClr val="FFFFFF"/>
+                </a:highlight>
+                <a:latin typeface="Consolas" panose="020B0609020204030204" pitchFamily="49" charset="0"/>
+                <a:cs typeface="Consolas" panose="020B0609020204030204" pitchFamily="49" charset="0"/>
+              </a:rPr>
+              <a:t>      </a:t>
+            </a:r>
             <a:r>
               <a:rPr lang="en" altLang="ja-JP" sz="1400" b="0" dirty="0">
                 <a:solidFill>
@@ -10252,7 +10310,7 @@
                 <a:latin typeface="Consolas" panose="020B0609020204030204" pitchFamily="49" charset="0"/>
                 <a:cs typeface="Consolas" panose="020B0609020204030204" pitchFamily="49" charset="0"/>
               </a:rPr>
-              <a:t>      - name: </a:t>
+              <a:t>- name: </a:t>
             </a:r>
             <a:r>
               <a:rPr lang="en" altLang="ja-JP" sz="1400" b="0" dirty="0">
